--- a/Homework_4_Slides_Template.pptx
+++ b/Homework_4_Slides_Template.pptx
@@ -28,7 +28,7 @@
       <p:boldItalic r:id="rId14"/>
     </p:embeddedFont>
     <p:embeddedFont>
-      <p:font typeface="PT Sans Narrow" panose="020B0506020203020204" pitchFamily="34" charset="77"/>
+      <p:font typeface="PT Sans Narrow" panose="020B0506020203020204" pitchFamily="34" charset="0"/>
       <p:regular r:id="rId15"/>
       <p:bold r:id="rId16"/>
     </p:embeddedFont>
@@ -751,8 +751,8 @@
         </p:nvSpPr>
         <p:spPr>
           <a:xfrm>
-            <a:off x="381300" y="685800"/>
-            <a:ext cx="6096075" cy="3429000"/>
+            <a:off x="381000" y="685800"/>
+            <a:ext cx="6096000" cy="3429000"/>
           </a:xfrm>
           <a:custGeom>
             <a:avLst/>
@@ -7137,10 +7137,10 @@
               <a:buNone/>
             </a:pPr>
             <a:r>
-              <a:rPr lang="en"/>
-              <a:t>Submitted By &lt;Student_Name&gt;</a:t>
+              <a:rPr lang="en" dirty="0"/>
+              <a:t>Submitted By Edward Ding</a:t>
             </a:r>
-            <a:endParaRPr/>
+            <a:endParaRPr dirty="0"/>
           </a:p>
         </p:txBody>
       </p:sp>
@@ -7258,8 +7258,8 @@
               <a:buNone/>
             </a:pPr>
             <a:r>
-              <a:rPr lang="en" dirty="0"/>
-              <a:t>_</a:t>
+              <a:rPr lang="en-US" dirty="0"/>
+              <a:t>The purpose of the replay memory is to act as a buffer to store past experiences or transitions from the model’s interaction with the environment. It allows us to reuse this data later. The main benefit of using something like this is to make sure that the transitions within each batch are decorrelated, which greatly stabilizes and improves the training process. If a model just relearns from most recent experiences, the training data is not independent, which can lead to unstable learning. </a:t>
             </a:r>
             <a:endParaRPr dirty="0"/>
           </a:p>
@@ -7358,24 +7358,491 @@
         </p:spPr>
         <p:txBody>
           <a:bodyPr spcFirstLastPara="1" wrap="square" lIns="91425" tIns="91425" rIns="91425" bIns="91425" anchor="t" anchorCtr="0">
-            <a:normAutofit/>
+            <a:normAutofit fontScale="85000" lnSpcReduction="10000"/>
           </a:bodyPr>
           <a:lstStyle/>
           <a:p>
-            <a:pPr marL="0" lvl="0" indent="0" algn="l" rtl="0">
-              <a:spcBef>
-                <a:spcPts val="0"/>
-              </a:spcBef>
-              <a:spcAft>
-                <a:spcPts val="1200"/>
-              </a:spcAft>
+            <a:pPr>
+              <a:lnSpc>
+                <a:spcPts val="1425"/>
+              </a:lnSpc>
               <a:buNone/>
             </a:pPr>
             <a:r>
-              <a:rPr lang="en" dirty="0"/>
-              <a:t>_</a:t>
+              <a:rPr lang="en-US" b="0" dirty="0">
+                <a:solidFill>
+                  <a:srgbClr val="008000"/>
+                </a:solidFill>
+                <a:effectLst/>
+                <a:latin typeface="Courier New" panose="02070309020205020404" pitchFamily="49" charset="0"/>
+              </a:rPr>
+              <a:t># BATCH_SIZE is the number of transitions sampled from the replay buffer</a:t>
             </a:r>
-            <a:endParaRPr dirty="0"/>
+            <a:endParaRPr lang="en-US" b="0" dirty="0">
+              <a:solidFill>
+                <a:srgbClr val="000000"/>
+              </a:solidFill>
+              <a:effectLst/>
+              <a:latin typeface="Courier New" panose="02070309020205020404" pitchFamily="49" charset="0"/>
+            </a:endParaRPr>
+          </a:p>
+          <a:p>
+            <a:pPr>
+              <a:lnSpc>
+                <a:spcPts val="1425"/>
+              </a:lnSpc>
+              <a:buNone/>
+            </a:pPr>
+            <a:r>
+              <a:rPr lang="en-US" b="0" dirty="0">
+                <a:solidFill>
+                  <a:srgbClr val="008000"/>
+                </a:solidFill>
+                <a:effectLst/>
+                <a:latin typeface="Courier New" panose="02070309020205020404" pitchFamily="49" charset="0"/>
+              </a:rPr>
+              <a:t># GAMMA is the discount factor as mentioned in the previous section</a:t>
+            </a:r>
+            <a:endParaRPr lang="en-US" b="0" dirty="0">
+              <a:solidFill>
+                <a:srgbClr val="000000"/>
+              </a:solidFill>
+              <a:effectLst/>
+              <a:latin typeface="Courier New" panose="02070309020205020404" pitchFamily="49" charset="0"/>
+            </a:endParaRPr>
+          </a:p>
+          <a:p>
+            <a:pPr>
+              <a:lnSpc>
+                <a:spcPts val="1425"/>
+              </a:lnSpc>
+              <a:buNone/>
+            </a:pPr>
+            <a:r>
+              <a:rPr lang="en-US" b="0" dirty="0">
+                <a:solidFill>
+                  <a:srgbClr val="008000"/>
+                </a:solidFill>
+                <a:effectLst/>
+                <a:latin typeface="Courier New" panose="02070309020205020404" pitchFamily="49" charset="0"/>
+              </a:rPr>
+              <a:t># EPS_START is the starting value of epsilon</a:t>
+            </a:r>
+            <a:endParaRPr lang="en-US" b="0" dirty="0">
+              <a:solidFill>
+                <a:srgbClr val="000000"/>
+              </a:solidFill>
+              <a:effectLst/>
+              <a:latin typeface="Courier New" panose="02070309020205020404" pitchFamily="49" charset="0"/>
+            </a:endParaRPr>
+          </a:p>
+          <a:p>
+            <a:pPr>
+              <a:lnSpc>
+                <a:spcPts val="1425"/>
+              </a:lnSpc>
+              <a:buNone/>
+            </a:pPr>
+            <a:r>
+              <a:rPr lang="en-US" b="0" dirty="0">
+                <a:solidFill>
+                  <a:srgbClr val="008000"/>
+                </a:solidFill>
+                <a:effectLst/>
+                <a:latin typeface="Courier New" panose="02070309020205020404" pitchFamily="49" charset="0"/>
+              </a:rPr>
+              <a:t># EPS_END is the final value of epsilon</a:t>
+            </a:r>
+            <a:endParaRPr lang="en-US" b="0" dirty="0">
+              <a:solidFill>
+                <a:srgbClr val="000000"/>
+              </a:solidFill>
+              <a:effectLst/>
+              <a:latin typeface="Courier New" panose="02070309020205020404" pitchFamily="49" charset="0"/>
+            </a:endParaRPr>
+          </a:p>
+          <a:p>
+            <a:pPr>
+              <a:lnSpc>
+                <a:spcPts val="1425"/>
+              </a:lnSpc>
+              <a:buNone/>
+            </a:pPr>
+            <a:r>
+              <a:rPr lang="en-US" b="0" dirty="0">
+                <a:solidFill>
+                  <a:srgbClr val="008000"/>
+                </a:solidFill>
+                <a:effectLst/>
+                <a:latin typeface="Courier New" panose="02070309020205020404" pitchFamily="49" charset="0"/>
+              </a:rPr>
+              <a:t># EPS_DECAY controls the rate of exponential decay of epsilon, higher means a slower decay</a:t>
+            </a:r>
+            <a:endParaRPr lang="en-US" b="0" dirty="0">
+              <a:solidFill>
+                <a:srgbClr val="000000"/>
+              </a:solidFill>
+              <a:effectLst/>
+              <a:latin typeface="Courier New" panose="02070309020205020404" pitchFamily="49" charset="0"/>
+            </a:endParaRPr>
+          </a:p>
+          <a:p>
+            <a:pPr>
+              <a:lnSpc>
+                <a:spcPts val="1425"/>
+              </a:lnSpc>
+              <a:buNone/>
+            </a:pPr>
+            <a:r>
+              <a:rPr lang="en-US" b="0" dirty="0">
+                <a:solidFill>
+                  <a:srgbClr val="008000"/>
+                </a:solidFill>
+                <a:effectLst/>
+                <a:latin typeface="Courier New" panose="02070309020205020404" pitchFamily="49" charset="0"/>
+              </a:rPr>
+              <a:t># TAU is the update rate of the target network</a:t>
+            </a:r>
+            <a:endParaRPr lang="en-US" b="0" dirty="0">
+              <a:solidFill>
+                <a:srgbClr val="000000"/>
+              </a:solidFill>
+              <a:effectLst/>
+              <a:latin typeface="Courier New" panose="02070309020205020404" pitchFamily="49" charset="0"/>
+            </a:endParaRPr>
+          </a:p>
+          <a:p>
+            <a:pPr>
+              <a:lnSpc>
+                <a:spcPts val="1425"/>
+              </a:lnSpc>
+              <a:buNone/>
+            </a:pPr>
+            <a:r>
+              <a:rPr lang="en-US" b="0" dirty="0">
+                <a:solidFill>
+                  <a:srgbClr val="008000"/>
+                </a:solidFill>
+                <a:effectLst/>
+                <a:latin typeface="Courier New" panose="02070309020205020404" pitchFamily="49" charset="0"/>
+              </a:rPr>
+              <a:t># LR is the learning rate of the ``</a:t>
+            </a:r>
+            <a:r>
+              <a:rPr lang="en-US" b="0" dirty="0" err="1">
+                <a:solidFill>
+                  <a:srgbClr val="008000"/>
+                </a:solidFill>
+                <a:effectLst/>
+                <a:latin typeface="Courier New" panose="02070309020205020404" pitchFamily="49" charset="0"/>
+              </a:rPr>
+              <a:t>AdamW</a:t>
+            </a:r>
+            <a:r>
+              <a:rPr lang="en-US" b="0" dirty="0">
+                <a:solidFill>
+                  <a:srgbClr val="008000"/>
+                </a:solidFill>
+                <a:effectLst/>
+                <a:latin typeface="Courier New" panose="02070309020205020404" pitchFamily="49" charset="0"/>
+              </a:rPr>
+              <a:t>`` optimizer</a:t>
+            </a:r>
+            <a:endParaRPr lang="en-US" b="0" dirty="0">
+              <a:solidFill>
+                <a:srgbClr val="000000"/>
+              </a:solidFill>
+              <a:effectLst/>
+              <a:latin typeface="Courier New" panose="02070309020205020404" pitchFamily="49" charset="0"/>
+            </a:endParaRPr>
+          </a:p>
+          <a:p>
+            <a:pPr>
+              <a:lnSpc>
+                <a:spcPts val="1425"/>
+              </a:lnSpc>
+              <a:buNone/>
+            </a:pPr>
+            <a:r>
+              <a:rPr lang="en-US" b="0" dirty="0">
+                <a:solidFill>
+                  <a:srgbClr val="000000"/>
+                </a:solidFill>
+                <a:effectLst/>
+                <a:latin typeface="Courier New" panose="02070309020205020404" pitchFamily="49" charset="0"/>
+              </a:rPr>
+              <a:t>BATCH_SIZE = </a:t>
+            </a:r>
+            <a:r>
+              <a:rPr lang="en-US" b="0" dirty="0">
+                <a:solidFill>
+                  <a:srgbClr val="116644"/>
+                </a:solidFill>
+                <a:effectLst/>
+                <a:latin typeface="Courier New" panose="02070309020205020404" pitchFamily="49" charset="0"/>
+              </a:rPr>
+              <a:t>128</a:t>
+            </a:r>
+            <a:endParaRPr lang="en-US" b="0" dirty="0">
+              <a:solidFill>
+                <a:srgbClr val="000000"/>
+              </a:solidFill>
+              <a:effectLst/>
+              <a:latin typeface="Courier New" panose="02070309020205020404" pitchFamily="49" charset="0"/>
+            </a:endParaRPr>
+          </a:p>
+          <a:p>
+            <a:pPr>
+              <a:lnSpc>
+                <a:spcPts val="1425"/>
+              </a:lnSpc>
+              <a:buNone/>
+            </a:pPr>
+            <a:r>
+              <a:rPr lang="en-US" b="0" dirty="0">
+                <a:solidFill>
+                  <a:srgbClr val="000000"/>
+                </a:solidFill>
+                <a:effectLst/>
+                <a:latin typeface="Courier New" panose="02070309020205020404" pitchFamily="49" charset="0"/>
+              </a:rPr>
+              <a:t>GAMMA = </a:t>
+            </a:r>
+            <a:r>
+              <a:rPr lang="en-US" b="0" dirty="0">
+                <a:solidFill>
+                  <a:srgbClr val="116644"/>
+                </a:solidFill>
+                <a:effectLst/>
+                <a:latin typeface="Courier New" panose="02070309020205020404" pitchFamily="49" charset="0"/>
+              </a:rPr>
+              <a:t>0.99</a:t>
+            </a:r>
+            <a:endParaRPr lang="en-US" b="0" dirty="0">
+              <a:solidFill>
+                <a:srgbClr val="000000"/>
+              </a:solidFill>
+              <a:effectLst/>
+              <a:latin typeface="Courier New" panose="02070309020205020404" pitchFamily="49" charset="0"/>
+            </a:endParaRPr>
+          </a:p>
+          <a:p>
+            <a:pPr>
+              <a:lnSpc>
+                <a:spcPts val="1425"/>
+              </a:lnSpc>
+              <a:buNone/>
+            </a:pPr>
+            <a:r>
+              <a:rPr lang="en-US" b="0" dirty="0">
+                <a:solidFill>
+                  <a:srgbClr val="000000"/>
+                </a:solidFill>
+                <a:effectLst/>
+                <a:latin typeface="Courier New" panose="02070309020205020404" pitchFamily="49" charset="0"/>
+              </a:rPr>
+              <a:t>EPS_START = </a:t>
+            </a:r>
+            <a:r>
+              <a:rPr lang="en-US" b="0" dirty="0">
+                <a:solidFill>
+                  <a:srgbClr val="116644"/>
+                </a:solidFill>
+                <a:effectLst/>
+                <a:latin typeface="Courier New" panose="02070309020205020404" pitchFamily="49" charset="0"/>
+              </a:rPr>
+              <a:t>0.9</a:t>
+            </a:r>
+            <a:endParaRPr lang="en-US" b="0" dirty="0">
+              <a:solidFill>
+                <a:srgbClr val="000000"/>
+              </a:solidFill>
+              <a:effectLst/>
+              <a:latin typeface="Courier New" panose="02070309020205020404" pitchFamily="49" charset="0"/>
+            </a:endParaRPr>
+          </a:p>
+          <a:p>
+            <a:pPr>
+              <a:lnSpc>
+                <a:spcPts val="1425"/>
+              </a:lnSpc>
+              <a:buNone/>
+            </a:pPr>
+            <a:r>
+              <a:rPr lang="en-US" b="0" dirty="0">
+                <a:solidFill>
+                  <a:srgbClr val="000000"/>
+                </a:solidFill>
+                <a:effectLst/>
+                <a:latin typeface="Courier New" panose="02070309020205020404" pitchFamily="49" charset="0"/>
+              </a:rPr>
+              <a:t>EPS_END = </a:t>
+            </a:r>
+            <a:r>
+              <a:rPr lang="en-US" b="0" dirty="0">
+                <a:solidFill>
+                  <a:srgbClr val="116644"/>
+                </a:solidFill>
+                <a:effectLst/>
+                <a:latin typeface="Courier New" panose="02070309020205020404" pitchFamily="49" charset="0"/>
+              </a:rPr>
+              <a:t>0.05</a:t>
+            </a:r>
+            <a:endParaRPr lang="en-US" b="0" dirty="0">
+              <a:solidFill>
+                <a:srgbClr val="000000"/>
+              </a:solidFill>
+              <a:effectLst/>
+              <a:latin typeface="Courier New" panose="02070309020205020404" pitchFamily="49" charset="0"/>
+            </a:endParaRPr>
+          </a:p>
+          <a:p>
+            <a:pPr>
+              <a:lnSpc>
+                <a:spcPts val="1425"/>
+              </a:lnSpc>
+              <a:buNone/>
+            </a:pPr>
+            <a:r>
+              <a:rPr lang="en-US" b="0" dirty="0">
+                <a:solidFill>
+                  <a:srgbClr val="000000"/>
+                </a:solidFill>
+                <a:effectLst/>
+                <a:latin typeface="Courier New" panose="02070309020205020404" pitchFamily="49" charset="0"/>
+              </a:rPr>
+              <a:t>EPS_DECAY = </a:t>
+            </a:r>
+            <a:r>
+              <a:rPr lang="en-US" b="0" dirty="0">
+                <a:solidFill>
+                  <a:srgbClr val="116644"/>
+                </a:solidFill>
+                <a:effectLst/>
+                <a:latin typeface="Courier New" panose="02070309020205020404" pitchFamily="49" charset="0"/>
+              </a:rPr>
+              <a:t>4000</a:t>
+            </a:r>
+            <a:endParaRPr lang="en-US" b="0" dirty="0">
+              <a:solidFill>
+                <a:srgbClr val="000000"/>
+              </a:solidFill>
+              <a:effectLst/>
+              <a:latin typeface="Courier New" panose="02070309020205020404" pitchFamily="49" charset="0"/>
+            </a:endParaRPr>
+          </a:p>
+          <a:p>
+            <a:pPr>
+              <a:lnSpc>
+                <a:spcPts val="1425"/>
+              </a:lnSpc>
+              <a:buNone/>
+            </a:pPr>
+            <a:r>
+              <a:rPr lang="en-US" b="0" dirty="0">
+                <a:solidFill>
+                  <a:srgbClr val="000000"/>
+                </a:solidFill>
+                <a:effectLst/>
+                <a:latin typeface="Courier New" panose="02070309020205020404" pitchFamily="49" charset="0"/>
+              </a:rPr>
+              <a:t>TAU = </a:t>
+            </a:r>
+            <a:r>
+              <a:rPr lang="en-US" b="0" dirty="0">
+                <a:solidFill>
+                  <a:srgbClr val="116644"/>
+                </a:solidFill>
+                <a:effectLst/>
+                <a:latin typeface="Courier New" panose="02070309020205020404" pitchFamily="49" charset="0"/>
+              </a:rPr>
+              <a:t>0.005</a:t>
+            </a:r>
+            <a:endParaRPr lang="en-US" b="0" dirty="0">
+              <a:solidFill>
+                <a:srgbClr val="000000"/>
+              </a:solidFill>
+              <a:effectLst/>
+              <a:latin typeface="Courier New" panose="02070309020205020404" pitchFamily="49" charset="0"/>
+            </a:endParaRPr>
+          </a:p>
+          <a:p>
+            <a:pPr>
+              <a:lnSpc>
+                <a:spcPts val="1425"/>
+              </a:lnSpc>
+            </a:pPr>
+            <a:r>
+              <a:rPr lang="en-US" b="0" dirty="0">
+                <a:solidFill>
+                  <a:srgbClr val="000000"/>
+                </a:solidFill>
+                <a:effectLst/>
+                <a:latin typeface="Courier New" panose="02070309020205020404" pitchFamily="49" charset="0"/>
+              </a:rPr>
+              <a:t>LR = </a:t>
+            </a:r>
+            <a:r>
+              <a:rPr lang="en-US" b="0" dirty="0">
+                <a:solidFill>
+                  <a:srgbClr val="116644"/>
+                </a:solidFill>
+                <a:effectLst/>
+                <a:latin typeface="Courier New" panose="02070309020205020404" pitchFamily="49" charset="0"/>
+              </a:rPr>
+              <a:t>1e-4</a:t>
+            </a:r>
+          </a:p>
+          <a:p>
+            <a:pPr>
+              <a:lnSpc>
+                <a:spcPts val="1425"/>
+              </a:lnSpc>
+            </a:pPr>
+            <a:endParaRPr lang="en-US" dirty="0">
+              <a:solidFill>
+                <a:srgbClr val="116644"/>
+              </a:solidFill>
+              <a:latin typeface="Courier New" panose="02070309020205020404" pitchFamily="49" charset="0"/>
+            </a:endParaRPr>
+          </a:p>
+          <a:p>
+            <a:pPr>
+              <a:lnSpc>
+                <a:spcPts val="1425"/>
+              </a:lnSpc>
+            </a:pPr>
+            <a:endParaRPr lang="en-US" dirty="0">
+              <a:solidFill>
+                <a:srgbClr val="000000"/>
+              </a:solidFill>
+              <a:latin typeface="Courier New" panose="02070309020205020404" pitchFamily="49" charset="0"/>
+            </a:endParaRPr>
+          </a:p>
+          <a:p>
+            <a:pPr marL="114300" indent="0">
+              <a:lnSpc>
+                <a:spcPts val="1425"/>
+              </a:lnSpc>
+              <a:buNone/>
+            </a:pPr>
+            <a:r>
+              <a:rPr lang="en-US" b="0" dirty="0">
+                <a:solidFill>
+                  <a:srgbClr val="000000"/>
+                </a:solidFill>
+                <a:effectLst/>
+                <a:latin typeface="Courier New" panose="02070309020205020404" pitchFamily="49" charset="0"/>
+              </a:rPr>
+              <a:t>These hyperparameters worked out pretty well, so I didn’t change them. </a:t>
+            </a:r>
+            <a:endParaRPr lang="en-US" b="0" dirty="0">
+              <a:solidFill>
+                <a:srgbClr val="116644"/>
+              </a:solidFill>
+              <a:effectLst/>
+              <a:latin typeface="Courier New" panose="02070309020205020404" pitchFamily="49" charset="0"/>
+            </a:endParaRPr>
           </a:p>
         </p:txBody>
       </p:sp>
@@ -7657,7 +8124,7 @@
         </p:spPr>
         <p:txBody>
           <a:bodyPr spcFirstLastPara="1" wrap="square" lIns="91425" tIns="91425" rIns="91425" bIns="91425" anchor="t" anchorCtr="0">
-            <a:normAutofit/>
+            <a:normAutofit fontScale="92500" lnSpcReduction="10000"/>
           </a:bodyPr>
           <a:lstStyle/>
           <a:p>
@@ -7671,10 +8138,63 @@
               <a:buNone/>
             </a:pPr>
             <a:r>
-              <a:rPr lang="en"/>
-              <a:t>_</a:t>
+              <a:rPr lang="en" dirty="0"/>
+              <a:t>At the beg</a:t>
             </a:r>
-            <a:endParaRPr/>
+            <a:r>
+              <a:rPr lang="en-US" dirty="0"/>
+              <a:t>in</a:t>
+            </a:r>
+            <a:r>
+              <a:rPr lang="en" dirty="0"/>
+              <a:t>ning, the Lunar Lander struggled with even controlling lateral movement; during the first trial, it would move all the way to the left of the screen and fail the test. </a:t>
+            </a:r>
+          </a:p>
+          <a:p>
+            <a:pPr marL="0" lvl="0" indent="0" algn="l" rtl="0">
+              <a:spcBef>
+                <a:spcPts val="0"/>
+              </a:spcBef>
+              <a:spcAft>
+                <a:spcPts val="1200"/>
+              </a:spcAft>
+              <a:buNone/>
+            </a:pPr>
+            <a:r>
+              <a:rPr lang="en" dirty="0"/>
+              <a:t>The Lunar Lander had trouble figuring out when to turn off its thrusters; sometimes even after landing between the two yellow flags it would still continue burning its thrusters at a lower power, extending the duration of the video. </a:t>
+            </a:r>
+          </a:p>
+          <a:p>
+            <a:pPr marL="0" lvl="0" indent="0" algn="l" rtl="0">
+              <a:spcBef>
+                <a:spcPts val="0"/>
+              </a:spcBef>
+              <a:spcAft>
+                <a:spcPts val="1200"/>
+              </a:spcAft>
+              <a:buNone/>
+            </a:pPr>
+            <a:r>
+              <a:rPr lang="en" dirty="0"/>
+              <a:t>The Lander would also sometimes tip over from too much lateral thrust, though the model quickly learned not to do this. </a:t>
+            </a:r>
+          </a:p>
+          <a:p>
+            <a:pPr marL="0" lvl="0" indent="0" algn="l" rtl="0">
+              <a:spcBef>
+                <a:spcPts val="0"/>
+              </a:spcBef>
+              <a:spcAft>
+                <a:spcPts val="1200"/>
+              </a:spcAft>
+              <a:buNone/>
+            </a:pPr>
+            <a:r>
+              <a:rPr lang="en-US" dirty="0"/>
+              <a:t>A good run had the Lander descend for a certain distance and then stop, then descend again, self-correcting for mistakes along the way. </a:t>
+            </a:r>
+            <a:endParaRPr dirty="0"/>
           </a:p>
         </p:txBody>
       </p:sp>
@@ -7767,7 +8287,7 @@
         <p:spPr>
           <a:xfrm>
             <a:off x="311700" y="1163650"/>
-            <a:ext cx="8520600" cy="3738900"/>
+            <a:ext cx="8443194" cy="3738900"/>
           </a:xfrm>
           <a:prstGeom prst="rect">
             <a:avLst/>
@@ -7789,10 +8309,10 @@
               <a:buNone/>
             </a:pPr>
             <a:r>
-              <a:rPr lang="en"/>
-              <a:t>_</a:t>
+              <a:rPr lang="en" dirty="0"/>
+              <a:t>The model/agent ranged between recklessness and cautiousness when playing the game; however, it generally did worse when it was trying to land too fast as it would cause the lander to go way off target, or drop like a rock. Then again, if it was too conservative it would take way too long for the lander to land, even if it landed in the correct spot. By the end of the 600 epochs the model found a good balance between boldness and caution, maybe leaning towards caution. I would say that it eventually does learn how to play the game decently well. </a:t>
             </a:r>
-            <a:endParaRPr/>
+            <a:endParaRPr dirty="0"/>
           </a:p>
         </p:txBody>
       </p:sp>
@@ -7885,7 +8405,7 @@
         <p:spPr>
           <a:xfrm>
             <a:off x="311700" y="1163650"/>
-            <a:ext cx="8520600" cy="3738900"/>
+            <a:ext cx="5364389" cy="3738900"/>
           </a:xfrm>
           <a:prstGeom prst="rect">
             <a:avLst/>
@@ -7893,7 +8413,7 @@
         </p:spPr>
         <p:txBody>
           <a:bodyPr spcFirstLastPara="1" wrap="square" lIns="91425" tIns="91425" rIns="91425" bIns="91425" anchor="t" anchorCtr="0">
-            <a:normAutofit/>
+            <a:normAutofit lnSpcReduction="10000"/>
           </a:bodyPr>
           <a:lstStyle/>
           <a:p>
@@ -7907,13 +8427,89 @@
               <a:buNone/>
             </a:pPr>
             <a:r>
-              <a:rPr lang="en"/>
-              <a:t>_</a:t>
+              <a:rPr lang="en" dirty="0"/>
+              <a:t>Yes they roughly do; the top GIF is an example of a near-perfect run, where the model was able to land the spacecraft within a short period of time and quite gently as well. This corresponds to</a:t>
             </a:r>
-            <a:endParaRPr/>
+            <a:r>
+              <a:rPr lang="en-US" dirty="0"/>
+              <a:t> t</a:t>
+            </a:r>
+            <a:r>
+              <a:rPr lang="en" dirty="0"/>
+              <a:t>he periods in the training graph where there’s a plateau when it comes to a low episode duration and a high reward. The bottom GIF is an example of the opposite behavior that’s also present, with</a:t>
+            </a:r>
+            <a:r>
+              <a:rPr lang="en-US" dirty="0"/>
+              <a:t> t</a:t>
+            </a:r>
+            <a:r>
+              <a:rPr lang="en" dirty="0"/>
+              <a:t>he model struggling to get the lander between the two flags within a reasonable amount of time. </a:t>
+            </a:r>
+            <a:endParaRPr dirty="0"/>
           </a:p>
         </p:txBody>
       </p:sp>
+      <p:pic>
+        <p:nvPicPr>
+          <p:cNvPr id="3" name="Picture 2" descr="A video game of a purple tent and yellow flags&#10;&#10;AI-generated content may be incorrect.">
+            <a:extLst>
+              <a:ext uri="{FF2B5EF4-FFF2-40B4-BE49-F238E27FC236}">
+                <a16:creationId xmlns:a16="http://schemas.microsoft.com/office/drawing/2014/main" id="{BF46FF8F-3FA0-A5F8-2853-F0B1A7707D2F}"/>
+              </a:ext>
+            </a:extLst>
+          </p:cNvPr>
+          <p:cNvPicPr>
+            <a:picLocks noChangeAspect="1"/>
+          </p:cNvPicPr>
+          <p:nvPr/>
+        </p:nvPicPr>
+        <p:blipFill>
+          <a:blip r:embed="rId3"/>
+          <a:stretch>
+            <a:fillRect/>
+          </a:stretch>
+        </p:blipFill>
+        <p:spPr>
+          <a:xfrm>
+            <a:off x="6026286" y="959451"/>
+            <a:ext cx="2940183" cy="1960122"/>
+          </a:xfrm>
+          <a:prstGeom prst="rect">
+            <a:avLst/>
+          </a:prstGeom>
+        </p:spPr>
+      </p:pic>
+      <p:pic>
+        <p:nvPicPr>
+          <p:cNvPr id="5" name="Picture 4" descr="A video game with a purple object and yellow flags">
+            <a:extLst>
+              <a:ext uri="{FF2B5EF4-FFF2-40B4-BE49-F238E27FC236}">
+                <a16:creationId xmlns:a16="http://schemas.microsoft.com/office/drawing/2014/main" id="{C4158A75-8B3D-B66A-F6CF-7E91F10ACB21}"/>
+              </a:ext>
+            </a:extLst>
+          </p:cNvPr>
+          <p:cNvPicPr>
+            <a:picLocks noChangeAspect="1"/>
+          </p:cNvPicPr>
+          <p:nvPr/>
+        </p:nvPicPr>
+        <p:blipFill>
+          <a:blip r:embed="rId4"/>
+          <a:stretch>
+            <a:fillRect/>
+          </a:stretch>
+        </p:blipFill>
+        <p:spPr>
+          <a:xfrm>
+            <a:off x="6026285" y="2942428"/>
+            <a:ext cx="2940184" cy="1960122"/>
+          </a:xfrm>
+          <a:prstGeom prst="rect">
+            <a:avLst/>
+          </a:prstGeom>
+        </p:spPr>
+      </p:pic>
     </p:spTree>
   </p:cSld>
   <p:clrMapOvr>

--- a/Homework_4_Slides_Template.pptx
+++ b/Homework_4_Slides_Template.pptx
@@ -279,6 +279,118 @@
     </p:ext>
   </p:extLst>
 </p:presentation>
+</file>
+
+<file path=ppt/ink/ink1.xml><?xml version="1.0" encoding="utf-8"?>
+<inkml:ink xmlns:inkml="http://www.w3.org/2003/InkML">
+  <inkml:definitions>
+    <inkml:context xml:id="ctx0">
+      <inkml:inkSource xml:id="inkSrc0">
+        <inkml:traceFormat>
+          <inkml:channel name="X" type="integer" min="-2.14748E9" max="2.14748E9" units="cm"/>
+          <inkml:channel name="Y" type="integer" min="-2.14748E9" max="2.14748E9" units="cm"/>
+          <inkml:channel name="F" type="integer" max="32767" units="dev"/>
+        </inkml:traceFormat>
+        <inkml:channelProperties>
+          <inkml:channelProperty channel="X" name="resolution" value="1000" units="1/cm"/>
+          <inkml:channelProperty channel="Y" name="resolution" value="1000" units="1/cm"/>
+          <inkml:channelProperty channel="F" name="resolution" value="0" units="1/dev"/>
+        </inkml:channelProperties>
+      </inkml:inkSource>
+      <inkml:timestamp xml:id="ts0" timeString="2025-03-12T21:12:53.751"/>
+    </inkml:context>
+    <inkml:brush xml:id="br0">
+      <inkml:brushProperty name="width" value="0.035" units="cm"/>
+      <inkml:brushProperty name="height" value="0.035" units="cm"/>
+      <inkml:brushProperty name="color" value="#E71224"/>
+    </inkml:brush>
+  </inkml:definitions>
+  <inkml:trace contextRef="#ctx0" brushRef="#br0">1181 3134 24575,'37'8'0,"58"-2"0,98-6 0,-88-1 0,-94 1 0,-1-1 0,1 0 0,-1-1 0,1 0 0,-1-1 0,0 0 0,0 0 0,0-1 0,0 0 0,-1-1 0,0 0 0,0-1 0,0 1 0,0-2 0,-1 1 0,0-1 0,9-11 0,-10 11 0,0 0 0,1 1 0,14-10 0,10-8 0,-29 21 0,0 0 0,0 0 0,-1-1 0,0 1 0,0-1 0,0 0 0,0 0 0,0 1 0,-1-1 0,1 0 0,-1-1 0,0 1 0,1-8 0,-1-6 0,-1-33 0,0 50 0,-4-69 0,-4 0 0,-3 1 0,-2 0 0,-29-82 0,-6 13 0,-68-133 0,-23 16 0,-18 11 0,-10-15 0,-7-58 0,105 186 0,-79-137 0,98 171 0,-24-38 0,-128-157 0,199 289 0,1 0 0,-1 0 0,0 0 0,0 0 0,0 0 0,0 1 0,-1-1 0,1 1 0,-1 0 0,1 0 0,-1 0 0,0 0 0,0 1 0,-4-2 0,2 2 0,-1 1 0,1 0 0,0 0 0,0 0 0,-1 0 0,1 1 0,0 0 0,-10 3 0,-4 3 0,0 0 0,1 0 0,0 2 0,0 1 0,1 0 0,0 1 0,1 1 0,-21 18 0,30-22 0,1 0 0,-1 0 0,1 1 0,0 0 0,-10 18 0,5-5 0,-13 35 0,21-42 0,-1 1 0,2-1 0,-2 22 0,2-20 0,0 0 0,-7 24 0,2-18 0,2-1 0,-8 44 0,6-4 0,2 63 0,6-31 0,2 103 0,3-151 0,3-1 0,1 0 0,20 57 0,-3-14 0,-13-36 0,43 151 0,-40-155 0,3-1 0,26 52 0,72 140 0,-91-183 0,-7-21 0,2-1 0,48 62 0,-41-61 0,43 74 0,-56-83 0,1 0 0,1-2 0,40 45 0,72 55 0,-124-119 0,27 25 0,-2 2 0,-1 2 0,-2 0 0,25 41 0,-30-42 0,14 22 0,-19-27 0,1-1 0,29 34 0,-9-13 0,-11-20-1365,-21-20-5461</inkml:trace>
+</inkml:ink>
+</file>
+
+<file path=ppt/ink/ink2.xml><?xml version="1.0" encoding="utf-8"?>
+<inkml:ink xmlns:inkml="http://www.w3.org/2003/InkML">
+  <inkml:definitions>
+    <inkml:context xml:id="ctx0">
+      <inkml:inkSource xml:id="inkSrc0">
+        <inkml:traceFormat>
+          <inkml:channel name="X" type="integer" min="-2.14748E9" max="2.14748E9" units="cm"/>
+          <inkml:channel name="Y" type="integer" min="-2.14748E9" max="2.14748E9" units="cm"/>
+          <inkml:channel name="F" type="integer" max="32767" units="dev"/>
+        </inkml:traceFormat>
+        <inkml:channelProperties>
+          <inkml:channelProperty channel="X" name="resolution" value="1000" units="1/cm"/>
+          <inkml:channelProperty channel="Y" name="resolution" value="1000" units="1/cm"/>
+          <inkml:channelProperty channel="F" name="resolution" value="0" units="1/dev"/>
+        </inkml:channelProperties>
+      </inkml:inkSource>
+      <inkml:timestamp xml:id="ts0" timeString="2025-03-12T21:12:58.243"/>
+    </inkml:context>
+    <inkml:brush xml:id="br0">
+      <inkml:brushProperty name="width" value="0.035" units="cm"/>
+      <inkml:brushProperty name="height" value="0.035" units="cm"/>
+      <inkml:brushProperty name="color" value="#E71224"/>
+    </inkml:brush>
+  </inkml:definitions>
+  <inkml:trace contextRef="#ctx0" brushRef="#br0">469 3007 24575,'170'-144'0,"-125"110"0,-1-2 0,-1-2 0,47-56 0,-45 33 0,-3-3 0,45-91 0,-44 76 0,56-79 0,-69 122 0,1 2 0,2 1 0,64-50 0,-15 13 0,-21 17 0,66-64 0,-111 100 0,-2 0 0,0-1 0,-1 0 0,-1-1 0,17-35 0,-7 11 0,-14 27 0,0-1 0,8-22 0,0-22 0,10-90 0,-10 55 0,-12 61 0,0-1 0,-2 0 0,-6-72 0,-26-104 0,30 210 0,-12-48 0,-1 0 0,-3 1 0,-29-63 0,26 69 0,-45-74 0,47 93 0,-1-1 0,-1 2 0,-43-41 0,55 58 0,-61-50 0,60 50 0,-1 0 0,0 1 0,0 0 0,-1 1 0,1 0 0,-16-4 0,-235-45 0,206 46 0,0 2 0,-101 4 0,144 3 0,-1 0 0,1 0 0,0 1 0,0 1 0,0 0 0,0 0 0,1 1 0,0 0 0,0 1 0,0 0 0,0 1 0,1 0 0,-9 9 0,-12 13 0,1 2 0,-30 41 0,55-66 0,-48 58 0,-47 65 0,84-107 0,1 2 0,1 0 0,-20 50 0,19-34 0,-52 133 0,-27 19 0,81-162 0,2 1 0,1 1 0,-7 46 0,10-45 0,-1 0 0,-2 0 0,-14 35 0,12-44 0,2 0 0,0 1 0,2 1 0,-6 32 0,1 67 0,1-11 0,2-61 0,4-26 0,-2 51 0,7 340 0,1-398 0,0 0 0,1 0 0,1 0 0,1 0 0,0 0 0,2 0 0,0-1 0,14 27 0,128 247 0,-140-282 0,0 0 0,0 0 0,1-1 0,12 12 0,13 13 0,-28-28 0,1 0 0,0-1 0,0 0 0,1 0 0,0-1 0,11 7 0,-7-6 0,-1 1 0,12 10 0,-19-13-170,0 1-1,-1-1 0,1 1 1,-1-1-1,0 1 0,-1 0 1,3 6-1,0-1-6655</inkml:trace>
+</inkml:ink>
+</file>
+
+<file path=ppt/ink/ink3.xml><?xml version="1.0" encoding="utf-8"?>
+<inkml:ink xmlns:inkml="http://www.w3.org/2003/InkML">
+  <inkml:definitions>
+    <inkml:context xml:id="ctx0">
+      <inkml:inkSource xml:id="inkSrc0">
+        <inkml:traceFormat>
+          <inkml:channel name="X" type="integer" min="-2.14748E9" max="2.14748E9" units="cm"/>
+          <inkml:channel name="Y" type="integer" min="-2.14748E9" max="2.14748E9" units="cm"/>
+          <inkml:channel name="F" type="integer" max="32767" units="dev"/>
+        </inkml:traceFormat>
+        <inkml:channelProperties>
+          <inkml:channelProperty channel="X" name="resolution" value="1000" units="1/cm"/>
+          <inkml:channelProperty channel="Y" name="resolution" value="1000" units="1/cm"/>
+          <inkml:channelProperty channel="F" name="resolution" value="0" units="1/dev"/>
+        </inkml:channelProperties>
+      </inkml:inkSource>
+      <inkml:timestamp xml:id="ts0" timeString="2025-03-12T21:13:02.971"/>
+    </inkml:context>
+    <inkml:brush xml:id="br0">
+      <inkml:brushProperty name="width" value="0.035" units="cm"/>
+      <inkml:brushProperty name="height" value="0.035" units="cm"/>
+      <inkml:brushProperty name="color" value="#E71224"/>
+    </inkml:brush>
+  </inkml:definitions>
+  <inkml:trace contextRef="#ctx0" brushRef="#br0">2842 41 24575,'-10'1'0,"1"0"0,0 1 0,-1 0 0,1 0 0,-10 5 0,-22 5 0,-16-5 0,0-1 0,-110-5 0,92-3 0,-546 2 0,427 13 0,33-1 0,-334-10 0,258-4 0,200 4 0,1 2 0,-37 8 0,-11 1 0,74-12 0,-106 18 0,102-16 0,1 1 0,-1 1 0,1 0 0,0 1 0,0 0 0,-15 11 0,-41 23 0,42-25 0,-26 19 0,48-30 0,1 1 0,-1-1 0,1 1 0,0 0 0,0 0 0,0 1 0,1-1 0,0 1 0,0 0 0,0 0 0,1 0 0,0 0 0,0 0 0,0 0 0,1 0 0,-1 8 0,-1 13 0,2-1 0,3 43 0,-2-51 0,1-3 0,1-1 0,0 0 0,1 0 0,0 0 0,2 0 0,-1 0 0,1-1 0,1 0 0,1 0 0,-1-1 0,2 1 0,0-1 0,0-1 0,1 0 0,1 0 0,0 0 0,0-2 0,1 1 0,13 8 0,7 4 0,1-2 0,44 20 0,74 24 0,-46-20 0,-7 0 0,-31-12 0,102 34 0,236 22 0,-184-46 0,182 24 0,-216-39 0,417 50 0,-370-45 0,-23-2 0,236-3 0,4-30 0,-363 2 0,-41 0 0,34 1 0,160-22 0,-190 10 0,63-24 0,-48 15 0,-14 5 0,-1-2 0,-1-2 0,66-38 0,-110 55 0,0-1 0,0 0 0,0 0 0,-1-1 0,1 1 0,-1-1 0,0 0 0,-1 0 0,1 0 0,-1-1 0,0 1 0,-1-1 0,1 0 0,-1 0 0,0 0 0,0 0 0,1-11 0,0-9 0,-1 1 0,-1-1 0,-3-28 0,0 14 0,1 1 0,-2-1 0,-12-61 0,9 77 0,-1-1 0,-1 1 0,-1 0 0,-1 1 0,-16-26 0,-4-1 0,-4 2 0,-1 1 0,-2 1 0,-2 2 0,-2 2 0,-2 2 0,-2 2 0,-1 2 0,-54-33 0,68 51 0,0 2 0,0 1 0,-2 2 0,1 1 0,-2 2 0,-52-10 0,17 7 0,-283-49 0,250 49 0,-153 0 0,-150 4 0,-35 4 0,254 7 0,-113-2 0,294 0-273,1 0 0,0 1 0,-1 0 0,-6 2 0,2 0-6553</inkml:trace>
+</inkml:ink>
+</file>
+
+<file path=ppt/ink/ink4.xml><?xml version="1.0" encoding="utf-8"?>
+<inkml:ink xmlns:inkml="http://www.w3.org/2003/InkML">
+  <inkml:definitions>
+    <inkml:context xml:id="ctx0">
+      <inkml:inkSource xml:id="inkSrc0">
+        <inkml:traceFormat>
+          <inkml:channel name="X" type="integer" min="-2.14748E9" max="2.14748E9" units="cm"/>
+          <inkml:channel name="Y" type="integer" min="-2.14748E9" max="2.14748E9" units="cm"/>
+          <inkml:channel name="F" type="integer" max="32767" units="dev"/>
+        </inkml:traceFormat>
+        <inkml:channelProperties>
+          <inkml:channelProperty channel="X" name="resolution" value="1000" units="1/cm"/>
+          <inkml:channelProperty channel="Y" name="resolution" value="1000" units="1/cm"/>
+          <inkml:channelProperty channel="F" name="resolution" value="0" units="1/dev"/>
+        </inkml:channelProperties>
+      </inkml:inkSource>
+      <inkml:timestamp xml:id="ts0" timeString="2025-03-12T21:13:09.028"/>
+    </inkml:context>
+    <inkml:brush xml:id="br0">
+      <inkml:brushProperty name="width" value="0.035" units="cm"/>
+      <inkml:brushProperty name="height" value="0.035" units="cm"/>
+      <inkml:brushProperty name="color" value="#E71224"/>
+    </inkml:brush>
+  </inkml:definitions>
+  <inkml:trace contextRef="#ctx0" brushRef="#br0">5979 2276 24575,'0'-3'0,"0"0"0,0-1 0,-1 1 0,1 0 0,-1-1 0,0 1 0,0 0 0,0 0 0,0 0 0,0 0 0,-1 0 0,-3-6 0,1 5 0,0-1 0,0 1 0,0 0 0,-1 0 0,1 1 0,-8-5 0,-21-11 0,0 2 0,-51-19 0,-5-3 0,-19-15 0,-310-132 0,371 170 0,-288-90 0,235 74 0,13 3 0,-258-85 0,52 16 0,-47 3 0,-15-5 0,207 60 0,-236-36 0,79 28 0,285 44 0,1 0 0,-1-2 0,-29-12 0,-51-31 0,31 13 0,-245-120 0,-55-28 0,-104-68 0,187 100 0,199 108 0,-15-4 0,-1 3 0,-125-35 0,211 74 0,14 5 0,-1-1 0,1 1 0,0 0 0,-1 0 0,1 1 0,-1-1 0,-5 0 0,7 2 0,1-1 0,0 0 0,-1 1 0,1-1 0,0 1 0,0-1 0,-1 1 0,1 0 0,0-1 0,0 1 0,0 0 0,0 0 0,0 0 0,0 0 0,0 0 0,0 0 0,0 0 0,0 0 0,1 0 0,-1 0 0,0 0 0,1 1 0,-1-1 0,0 2 0,-10 23 0,-16 36 0,-23 82 0,44-123 0,1 0 0,1 0 0,1 1 0,1-1 0,1 1 0,1-1 0,1 1 0,5 26 0,0-20 0,1 1 0,2-1 0,1-1 0,2 0 0,22 41 0,89 121 0,-72-116 0,215 295 0,-233-325 0,-3-2 0,2-1 0,2-2 0,60 55 0,-17-38 0,94 54 0,-68-46 0,174 88 0,11-24 0,-93-36 0,-99-53 0,120 31 0,349 37 0,-288-61 0,402 71 0,-221-39 0,-280-49 0,2-7 0,186-3 0,-366-18 0,23 0 0,-1 0 0,1-2 0,-1 0 0,0-2 0,30-7 0,-37 7 0,-1 1 0,1 1 0,0 0 0,0 1 0,19 1 0,-18 0 0,0 0 0,0-1 0,0 0 0,26-7 0,104-43 0,-117 41 0,1 0 0,0 3 0,61-9 0,94 5 0,-155 10 0,-25 0 0,0 1 0,0-1 0,1 0 0,-1-1 0,0 1 0,-1-1 0,1 0 0,0 0 0,0-1 0,-1 1 0,1-1 0,-1 0 0,0 0 0,0-1 0,0 1 0,4-6 0,-1 3 0,1-1 0,-1 1 0,12-7 0,61-22 0,-48 17 247,36-18-1859,-54 31-5214</inkml:trace>
+</inkml:ink>
 </file>
 
 <file path=ppt/notesMasters/notesMaster1.xml><?xml version="1.0" encoding="utf-8"?>
@@ -7951,7 +8063,7 @@
         </p:spPr>
         <p:txBody>
           <a:bodyPr spcFirstLastPara="1" wrap="square" lIns="91425" tIns="91425" rIns="91425" bIns="91425" anchor="t" anchorCtr="0">
-            <a:normAutofit/>
+            <a:normAutofit fontScale="85000" lnSpcReduction="10000"/>
           </a:bodyPr>
           <a:lstStyle/>
           <a:p>
@@ -7965,8 +8077,8 @@
               <a:buNone/>
             </a:pPr>
             <a:r>
-              <a:rPr lang="en" dirty="0"/>
-              <a:t>_</a:t>
+              <a:rPr lang="en-US" dirty="0"/>
+              <a:t>Since our model needs to average around 200 reward points to be considered robust, we see it clearly reach that threshold relatively quickly. Although it might appear at first glance that the rewards plateau, we see that there’s still work being done as there’s a slight downward trend for the episode duration, meaning that the model gets better at landing the spacecraft in a faster period of time.</a:t>
             </a:r>
             <a:endParaRPr dirty="0"/>
           </a:p>
@@ -8014,7 +8126,7 @@
               </a:spcAft>
               <a:buNone/>
             </a:pPr>
-            <a:endParaRPr>
+            <a:endParaRPr lang="en-US">
               <a:latin typeface="Open Sans"/>
               <a:ea typeface="Open Sans"/>
               <a:cs typeface="Open Sans"/>
@@ -8023,6 +8135,240 @@
           </a:p>
         </p:txBody>
       </p:sp>
+      <p:pic>
+        <p:nvPicPr>
+          <p:cNvPr id="3" name="Picture 2" descr="A graph of a graph showing a number of different colored lines&#10;&#10;AI-generated content may be incorrect.">
+            <a:extLst>
+              <a:ext uri="{FF2B5EF4-FFF2-40B4-BE49-F238E27FC236}">
+                <a16:creationId xmlns:a16="http://schemas.microsoft.com/office/drawing/2014/main" id="{DB924BC6-A42E-EEFA-5731-A63701ECF7A8}"/>
+              </a:ext>
+            </a:extLst>
+          </p:cNvPr>
+          <p:cNvPicPr>
+            <a:picLocks noChangeAspect="1"/>
+          </p:cNvPicPr>
+          <p:nvPr/>
+        </p:nvPicPr>
+        <p:blipFill>
+          <a:blip r:embed="rId3"/>
+          <a:stretch>
+            <a:fillRect/>
+          </a:stretch>
+        </p:blipFill>
+        <p:spPr>
+          <a:xfrm>
+            <a:off x="700255" y="1959900"/>
+            <a:ext cx="3871745" cy="2924700"/>
+          </a:xfrm>
+          <a:prstGeom prst="rect">
+            <a:avLst/>
+          </a:prstGeom>
+        </p:spPr>
+      </p:pic>
+      <mc:AlternateContent xmlns:mc="http://schemas.openxmlformats.org/markup-compatibility/2006">
+        <mc:Choice xmlns:p14="http://schemas.microsoft.com/office/powerpoint/2010/main" Requires="p14">
+          <p:contentPart p14:bwMode="auto" r:id="rId4">
+            <p14:nvContentPartPr>
+              <p14:cNvPr id="4" name="Ink 3">
+                <a:extLst>
+                  <a:ext uri="{FF2B5EF4-FFF2-40B4-BE49-F238E27FC236}">
+                    <a16:creationId xmlns:a16="http://schemas.microsoft.com/office/drawing/2014/main" id="{977AFB30-1AA3-E71A-E357-EA597CC18662}"/>
+                  </a:ext>
+                </a:extLst>
+              </p14:cNvPr>
+              <p14:cNvContentPartPr/>
+              <p14:nvPr/>
+            </p14:nvContentPartPr>
+            <p14:xfrm>
+              <a:off x="1506174" y="2095435"/>
+              <a:ext cx="683280" cy="1134360"/>
+            </p14:xfrm>
+          </p:contentPart>
+        </mc:Choice>
+        <mc:Fallback>
+          <p:pic>
+            <p:nvPicPr>
+              <p:cNvPr id="4" name="Ink 3">
+                <a:extLst>
+                  <a:ext uri="{FF2B5EF4-FFF2-40B4-BE49-F238E27FC236}">
+                    <a16:creationId xmlns:a16="http://schemas.microsoft.com/office/drawing/2014/main" id="{977AFB30-1AA3-E71A-E357-EA597CC18662}"/>
+                  </a:ext>
+                </a:extLst>
+              </p:cNvPr>
+              <p:cNvPicPr/>
+              <p:nvPr/>
+            </p:nvPicPr>
+            <p:blipFill>
+              <a:blip r:embed="rId5"/>
+              <a:stretch>
+                <a:fillRect/>
+              </a:stretch>
+            </p:blipFill>
+            <p:spPr>
+              <a:xfrm>
+                <a:off x="1500054" y="2089315"/>
+                <a:ext cx="695520" cy="1146600"/>
+              </a:xfrm>
+              <a:prstGeom prst="rect">
+                <a:avLst/>
+              </a:prstGeom>
+            </p:spPr>
+          </p:pic>
+        </mc:Fallback>
+      </mc:AlternateContent>
+      <mc:AlternateContent xmlns:mc="http://schemas.openxmlformats.org/markup-compatibility/2006">
+        <mc:Choice xmlns:p14="http://schemas.microsoft.com/office/powerpoint/2010/main" Requires="p14">
+          <p:contentPart p14:bwMode="auto" r:id="rId6">
+            <p14:nvContentPartPr>
+              <p14:cNvPr id="5" name="Ink 4">
+                <a:extLst>
+                  <a:ext uri="{FF2B5EF4-FFF2-40B4-BE49-F238E27FC236}">
+                    <a16:creationId xmlns:a16="http://schemas.microsoft.com/office/drawing/2014/main" id="{13BD9C41-2093-A7A9-468B-8868BC6BE4BC}"/>
+                  </a:ext>
+                </a:extLst>
+              </p14:cNvPr>
+              <p14:cNvContentPartPr/>
+              <p14:nvPr/>
+            </p14:nvContentPartPr>
+            <p14:xfrm>
+              <a:off x="965094" y="3522115"/>
+              <a:ext cx="668880" cy="1082520"/>
+            </p14:xfrm>
+          </p:contentPart>
+        </mc:Choice>
+        <mc:Fallback>
+          <p:pic>
+            <p:nvPicPr>
+              <p:cNvPr id="5" name="Ink 4">
+                <a:extLst>
+                  <a:ext uri="{FF2B5EF4-FFF2-40B4-BE49-F238E27FC236}">
+                    <a16:creationId xmlns:a16="http://schemas.microsoft.com/office/drawing/2014/main" id="{13BD9C41-2093-A7A9-468B-8868BC6BE4BC}"/>
+                  </a:ext>
+                </a:extLst>
+              </p:cNvPr>
+              <p:cNvPicPr/>
+              <p:nvPr/>
+            </p:nvPicPr>
+            <p:blipFill>
+              <a:blip r:embed="rId7"/>
+              <a:stretch>
+                <a:fillRect/>
+              </a:stretch>
+            </p:blipFill>
+            <p:spPr>
+              <a:xfrm>
+                <a:off x="958974" y="3515995"/>
+                <a:ext cx="681120" cy="1094760"/>
+              </a:xfrm>
+              <a:prstGeom prst="rect">
+                <a:avLst/>
+              </a:prstGeom>
+            </p:spPr>
+          </p:pic>
+        </mc:Fallback>
+      </mc:AlternateContent>
+      <mc:AlternateContent xmlns:mc="http://schemas.openxmlformats.org/markup-compatibility/2006">
+        <mc:Choice xmlns:p14="http://schemas.microsoft.com/office/powerpoint/2010/main" Requires="p14">
+          <p:contentPart p14:bwMode="auto" r:id="rId8">
+            <p14:nvContentPartPr>
+              <p14:cNvPr id="6" name="Ink 5">
+                <a:extLst>
+                  <a:ext uri="{FF2B5EF4-FFF2-40B4-BE49-F238E27FC236}">
+                    <a16:creationId xmlns:a16="http://schemas.microsoft.com/office/drawing/2014/main" id="{B47F3481-01DC-524D-B7ED-954939458299}"/>
+                  </a:ext>
+                </a:extLst>
+              </p14:cNvPr>
+              <p14:cNvContentPartPr/>
+              <p14:nvPr/>
+            </p14:nvContentPartPr>
+            <p14:xfrm>
+              <a:off x="2886414" y="3465595"/>
+              <a:ext cx="1814040" cy="543600"/>
+            </p14:xfrm>
+          </p:contentPart>
+        </mc:Choice>
+        <mc:Fallback>
+          <p:pic>
+            <p:nvPicPr>
+              <p:cNvPr id="6" name="Ink 5">
+                <a:extLst>
+                  <a:ext uri="{FF2B5EF4-FFF2-40B4-BE49-F238E27FC236}">
+                    <a16:creationId xmlns:a16="http://schemas.microsoft.com/office/drawing/2014/main" id="{B47F3481-01DC-524D-B7ED-954939458299}"/>
+                  </a:ext>
+                </a:extLst>
+              </p:cNvPr>
+              <p:cNvPicPr/>
+              <p:nvPr/>
+            </p:nvPicPr>
+            <p:blipFill>
+              <a:blip r:embed="rId9"/>
+              <a:stretch>
+                <a:fillRect/>
+              </a:stretch>
+            </p:blipFill>
+            <p:spPr>
+              <a:xfrm>
+                <a:off x="2880294" y="3459475"/>
+                <a:ext cx="1826280" cy="555840"/>
+              </a:xfrm>
+              <a:prstGeom prst="rect">
+                <a:avLst/>
+              </a:prstGeom>
+            </p:spPr>
+          </p:pic>
+        </mc:Fallback>
+      </mc:AlternateContent>
+      <mc:AlternateContent xmlns:mc="http://schemas.openxmlformats.org/markup-compatibility/2006">
+        <mc:Choice xmlns:p14="http://schemas.microsoft.com/office/powerpoint/2010/main" Requires="p14">
+          <p:contentPart p14:bwMode="auto" r:id="rId10">
+            <p14:nvContentPartPr>
+              <p14:cNvPr id="7" name="Ink 6">
+                <a:extLst>
+                  <a:ext uri="{FF2B5EF4-FFF2-40B4-BE49-F238E27FC236}">
+                    <a16:creationId xmlns:a16="http://schemas.microsoft.com/office/drawing/2014/main" id="{BA3178C2-32E7-FE8F-F607-9E034C6A3793}"/>
+                  </a:ext>
+                </a:extLst>
+              </p14:cNvPr>
+              <p14:cNvContentPartPr/>
+              <p14:nvPr/>
+            </p14:nvContentPartPr>
+            <p14:xfrm>
+              <a:off x="2452254" y="2306395"/>
+              <a:ext cx="2200320" cy="965160"/>
+            </p14:xfrm>
+          </p:contentPart>
+        </mc:Choice>
+        <mc:Fallback>
+          <p:pic>
+            <p:nvPicPr>
+              <p:cNvPr id="7" name="Ink 6">
+                <a:extLst>
+                  <a:ext uri="{FF2B5EF4-FFF2-40B4-BE49-F238E27FC236}">
+                    <a16:creationId xmlns:a16="http://schemas.microsoft.com/office/drawing/2014/main" id="{BA3178C2-32E7-FE8F-F607-9E034C6A3793}"/>
+                  </a:ext>
+                </a:extLst>
+              </p:cNvPr>
+              <p:cNvPicPr/>
+              <p:nvPr/>
+            </p:nvPicPr>
+            <p:blipFill>
+              <a:blip r:embed="rId11"/>
+              <a:stretch>
+                <a:fillRect/>
+              </a:stretch>
+            </p:blipFill>
+            <p:spPr>
+              <a:xfrm>
+                <a:off x="2446134" y="2300275"/>
+                <a:ext cx="2212560" cy="977400"/>
+              </a:xfrm>
+              <a:prstGeom prst="rect">
+                <a:avLst/>
+              </a:prstGeom>
+            </p:spPr>
+          </p:pic>
+        </mc:Fallback>
+      </mc:AlternateContent>
     </p:spTree>
   </p:cSld>
   <p:clrMapOvr>

--- a/Homework_4_Slides_Template.pptx
+++ b/Homework_4_Slides_Template.pptx
@@ -8945,7 +8945,7 @@
         </p:spPr>
         <p:txBody>
           <a:bodyPr spcFirstLastPara="1" wrap="square" lIns="91425" tIns="91425" rIns="91425" bIns="91425" anchor="t" anchorCtr="0">
-            <a:normAutofit/>
+            <a:normAutofit fontScale="77500" lnSpcReduction="20000"/>
           </a:bodyPr>
           <a:lstStyle/>
           <a:p>
@@ -8960,7 +8960,15 @@
             </a:pPr>
             <a:r>
               <a:rPr lang="en" dirty="0"/>
-              <a:t>_</a:t>
+              <a:t>T</a:t>
+            </a:r>
+            <a:r>
+              <a:rPr lang="en-US" dirty="0"/>
+              <a:t>he</a:t>
+            </a:r>
+            <a:r>
+              <a:rPr lang="en" dirty="0"/>
+              <a:t> model’s policy appears to be very consistent, as there’s a clear grouping between 200 and 300 for duration. Additionally, the reward seemst o be clustered around the 6k-7k range, but with less clear of a correlation, indicating that there might be still a little bit of randomless that leaks into the model’s landing behavior. </a:t>
             </a:r>
             <a:endParaRPr dirty="0"/>
           </a:p>
@@ -8974,8 +8982,8 @@
         </p:nvSpPr>
         <p:spPr>
           <a:xfrm>
-            <a:off x="2554500" y="1277225"/>
-            <a:ext cx="6277800" cy="3725100"/>
+            <a:off x="2635936" y="1277225"/>
+            <a:ext cx="6196363" cy="3725100"/>
           </a:xfrm>
           <a:prstGeom prst="rect">
             <a:avLst/>
@@ -9017,6 +9025,66 @@
           </a:p>
         </p:txBody>
       </p:sp>
+      <p:pic>
+        <p:nvPicPr>
+          <p:cNvPr id="3" name="Picture 2">
+            <a:extLst>
+              <a:ext uri="{FF2B5EF4-FFF2-40B4-BE49-F238E27FC236}">
+                <a16:creationId xmlns:a16="http://schemas.microsoft.com/office/drawing/2014/main" id="{3EE1BC8E-0830-29C3-7B1D-0604000F013D}"/>
+              </a:ext>
+            </a:extLst>
+          </p:cNvPr>
+          <p:cNvPicPr>
+            <a:picLocks noChangeAspect="1"/>
+          </p:cNvPicPr>
+          <p:nvPr/>
+        </p:nvPicPr>
+        <p:blipFill>
+          <a:blip r:embed="rId3"/>
+          <a:stretch>
+            <a:fillRect/>
+          </a:stretch>
+        </p:blipFill>
+        <p:spPr>
+          <a:xfrm>
+            <a:off x="2635937" y="1319212"/>
+            <a:ext cx="3253806" cy="2109817"/>
+          </a:xfrm>
+          <a:prstGeom prst="rect">
+            <a:avLst/>
+          </a:prstGeom>
+        </p:spPr>
+      </p:pic>
+      <p:pic>
+        <p:nvPicPr>
+          <p:cNvPr id="5" name="Picture 4" descr="A graph showing a chart&#10;&#10;AI-generated content may be incorrect.">
+            <a:extLst>
+              <a:ext uri="{FF2B5EF4-FFF2-40B4-BE49-F238E27FC236}">
+                <a16:creationId xmlns:a16="http://schemas.microsoft.com/office/drawing/2014/main" id="{88B63945-A1F1-FE69-AC7E-386A8D0809C8}"/>
+              </a:ext>
+            </a:extLst>
+          </p:cNvPr>
+          <p:cNvPicPr>
+            <a:picLocks noChangeAspect="1"/>
+          </p:cNvPicPr>
+          <p:nvPr/>
+        </p:nvPicPr>
+        <p:blipFill>
+          <a:blip r:embed="rId4"/>
+          <a:stretch>
+            <a:fillRect/>
+          </a:stretch>
+        </p:blipFill>
+        <p:spPr>
+          <a:xfrm>
+            <a:off x="5943587" y="2848924"/>
+            <a:ext cx="2850515" cy="2107775"/>
+          </a:xfrm>
+          <a:prstGeom prst="rect">
+            <a:avLst/>
+          </a:prstGeom>
+        </p:spPr>
+      </p:pic>
     </p:spTree>
   </p:cSld>
   <p:clrMapOvr>

--- a/Homework_4_Slides_Template.pptx
+++ b/Homework_4_Slides_Template.pptx
@@ -28,7 +28,7 @@
       <p:boldItalic r:id="rId14"/>
     </p:embeddedFont>
     <p:embeddedFont>
-      <p:font typeface="PT Sans Narrow" panose="020B0506020203020204" pitchFamily="34" charset="0"/>
+      <p:font typeface="PT Sans Narrow" panose="020B0506020203020204" pitchFamily="34" charset="77"/>
       <p:regular r:id="rId15"/>
       <p:bold r:id="rId16"/>
     </p:embeddedFont>
@@ -1654,7 +1654,7 @@
               </a:spcAft>
               <a:buNone/>
             </a:pPr>
-            <a:endParaRPr/>
+            <a:endParaRPr dirty="0"/>
           </a:p>
         </p:txBody>
       </p:sp>
@@ -8165,8 +8165,8 @@
           </a:prstGeom>
         </p:spPr>
       </p:pic>
-      <mc:AlternateContent xmlns:mc="http://schemas.openxmlformats.org/markup-compatibility/2006">
-        <mc:Choice xmlns:p14="http://schemas.microsoft.com/office/powerpoint/2010/main" Requires="p14">
+      <mc:AlternateContent xmlns:mc="http://schemas.openxmlformats.org/markup-compatibility/2006" xmlns:p14="http://schemas.microsoft.com/office/powerpoint/2010/main">
+        <mc:Choice Requires="p14">
           <p:contentPart p14:bwMode="auto" r:id="rId4">
             <p14:nvContentPartPr>
               <p14:cNvPr id="4" name="Ink 3">
@@ -8185,7 +8185,7 @@
             </p14:xfrm>
           </p:contentPart>
         </mc:Choice>
-        <mc:Fallback>
+        <mc:Fallback xmlns="">
           <p:pic>
             <p:nvPicPr>
               <p:cNvPr id="4" name="Ink 3">
@@ -8216,8 +8216,8 @@
           </p:pic>
         </mc:Fallback>
       </mc:AlternateContent>
-      <mc:AlternateContent xmlns:mc="http://schemas.openxmlformats.org/markup-compatibility/2006">
-        <mc:Choice xmlns:p14="http://schemas.microsoft.com/office/powerpoint/2010/main" Requires="p14">
+      <mc:AlternateContent xmlns:mc="http://schemas.openxmlformats.org/markup-compatibility/2006" xmlns:p14="http://schemas.microsoft.com/office/powerpoint/2010/main">
+        <mc:Choice Requires="p14">
           <p:contentPart p14:bwMode="auto" r:id="rId6">
             <p14:nvContentPartPr>
               <p14:cNvPr id="5" name="Ink 4">
@@ -8236,7 +8236,7 @@
             </p14:xfrm>
           </p:contentPart>
         </mc:Choice>
-        <mc:Fallback>
+        <mc:Fallback xmlns="">
           <p:pic>
             <p:nvPicPr>
               <p:cNvPr id="5" name="Ink 4">
@@ -8267,8 +8267,8 @@
           </p:pic>
         </mc:Fallback>
       </mc:AlternateContent>
-      <mc:AlternateContent xmlns:mc="http://schemas.openxmlformats.org/markup-compatibility/2006">
-        <mc:Choice xmlns:p14="http://schemas.microsoft.com/office/powerpoint/2010/main" Requires="p14">
+      <mc:AlternateContent xmlns:mc="http://schemas.openxmlformats.org/markup-compatibility/2006" xmlns:p14="http://schemas.microsoft.com/office/powerpoint/2010/main">
+        <mc:Choice Requires="p14">
           <p:contentPart p14:bwMode="auto" r:id="rId8">
             <p14:nvContentPartPr>
               <p14:cNvPr id="6" name="Ink 5">
@@ -8287,7 +8287,7 @@
             </p14:xfrm>
           </p:contentPart>
         </mc:Choice>
-        <mc:Fallback>
+        <mc:Fallback xmlns="">
           <p:pic>
             <p:nvPicPr>
               <p:cNvPr id="6" name="Ink 5">
@@ -8318,8 +8318,8 @@
           </p:pic>
         </mc:Fallback>
       </mc:AlternateContent>
-      <mc:AlternateContent xmlns:mc="http://schemas.openxmlformats.org/markup-compatibility/2006">
-        <mc:Choice xmlns:p14="http://schemas.microsoft.com/office/powerpoint/2010/main" Requires="p14">
+      <mc:AlternateContent xmlns:mc="http://schemas.openxmlformats.org/markup-compatibility/2006" xmlns:p14="http://schemas.microsoft.com/office/powerpoint/2010/main">
+        <mc:Choice Requires="p14">
           <p:contentPart p14:bwMode="auto" r:id="rId10">
             <p14:nvContentPartPr>
               <p14:cNvPr id="7" name="Ink 6">
@@ -8338,7 +8338,7 @@
             </p14:xfrm>
           </p:contentPart>
         </mc:Choice>
-        <mc:Fallback>
+        <mc:Fallback xmlns="">
           <p:pic>
             <p:nvPicPr>
               <p:cNvPr id="7" name="Ink 6">
@@ -8945,7 +8945,7 @@
         </p:spPr>
         <p:txBody>
           <a:bodyPr spcFirstLastPara="1" wrap="square" lIns="91425" tIns="91425" rIns="91425" bIns="91425" anchor="t" anchorCtr="0">
-            <a:normAutofit fontScale="77500" lnSpcReduction="20000"/>
+            <a:normAutofit fontScale="62500" lnSpcReduction="20000"/>
           </a:bodyPr>
           <a:lstStyle/>
           <a:p>
@@ -8968,9 +8968,13 @@
             </a:r>
             <a:r>
               <a:rPr lang="en" dirty="0"/>
-              <a:t> model’s policy appears to be very consistent, as there’s a clear grouping between 200 and 300 for duration. Additionally, the reward seemst o be clustered around the 6k-7k range, but with less clear of a correlation, indicating that there might be still a little bit of randomless that leaks into the model’s landing behavior. </a:t>
+              <a:t> model’s policy appears to be very consistent, as there’s a clear grouping between 200 and 300 for duration. Additionally, the reward seems to be clustered around the 200-300 scale, with a decently normal distribution as well, which is the targeted accuracy that we need. The outliers in the 700 range and the values below 200 indicate that there’s still a little bit of randomness at play; sometimes the model will work really well and sometimes the model will work far less well depending on the starting conditions and if the model gets stuck in a certain part of </a:t>
             </a:r>
-            <a:endParaRPr dirty="0"/>
+            <a:r>
+              <a:rPr lang="en"/>
+              <a:t>the gradient. </a:t>
+            </a:r>
+            <a:endParaRPr lang="en" dirty="0"/>
           </a:p>
         </p:txBody>
       </p:sp>
@@ -8982,7 +8986,7 @@
         </p:nvSpPr>
         <p:spPr>
           <a:xfrm>
-            <a:off x="2635936" y="1277225"/>
+            <a:off x="2635937" y="1334080"/>
             <a:ext cx="6196363" cy="3725100"/>
           </a:xfrm>
           <a:prstGeom prst="rect">
@@ -9027,10 +9031,10 @@
       </p:sp>
       <p:pic>
         <p:nvPicPr>
-          <p:cNvPr id="3" name="Picture 2">
+          <p:cNvPr id="7" name="Picture 6" descr="A graph with a bar&#10;&#10;AI-generated content may be incorrect.">
             <a:extLst>
               <a:ext uri="{FF2B5EF4-FFF2-40B4-BE49-F238E27FC236}">
-                <a16:creationId xmlns:a16="http://schemas.microsoft.com/office/drawing/2014/main" id="{3EE1BC8E-0830-29C3-7B1D-0604000F013D}"/>
+                <a16:creationId xmlns:a16="http://schemas.microsoft.com/office/drawing/2014/main" id="{E3694A87-1932-4235-3943-0C1FE7457677}"/>
               </a:ext>
             </a:extLst>
           </p:cNvPr>
@@ -9047,8 +9051,8 @@
         </p:blipFill>
         <p:spPr>
           <a:xfrm>
-            <a:off x="2635937" y="1319212"/>
-            <a:ext cx="3253806" cy="2109817"/>
+            <a:off x="2695162" y="1377125"/>
+            <a:ext cx="6077909" cy="1881058"/>
           </a:xfrm>
           <a:prstGeom prst="rect">
             <a:avLst/>
@@ -9057,10 +9061,10 @@
       </p:pic>
       <p:pic>
         <p:nvPicPr>
-          <p:cNvPr id="5" name="Picture 4" descr="A graph showing a chart&#10;&#10;AI-generated content may be incorrect.">
+          <p:cNvPr id="9" name="Picture 8" descr="A graph with a blue and purple graph&#10;&#10;AI-generated content may be incorrect.">
             <a:extLst>
               <a:ext uri="{FF2B5EF4-FFF2-40B4-BE49-F238E27FC236}">
-                <a16:creationId xmlns:a16="http://schemas.microsoft.com/office/drawing/2014/main" id="{88B63945-A1F1-FE69-AC7E-386A8D0809C8}"/>
+                <a16:creationId xmlns:a16="http://schemas.microsoft.com/office/drawing/2014/main" id="{B73ACDA0-CE09-D053-83D1-E158771F2F28}"/>
               </a:ext>
             </a:extLst>
           </p:cNvPr>
@@ -9077,8 +9081,8 @@
         </p:blipFill>
         <p:spPr>
           <a:xfrm>
-            <a:off x="5943587" y="2848924"/>
-            <a:ext cx="2850515" cy="2107775"/>
+            <a:off x="2893457" y="3279523"/>
+            <a:ext cx="5681317" cy="1758317"/>
           </a:xfrm>
           <a:prstGeom prst="rect">
             <a:avLst/>
